--- a/research-materials/slides/02_輪講①_20261023_Hershfield2011_未来の自分.pptx
+++ b/research-materials/slides/02_輪講①_20261023_Hershfield2011_未来の自分.pptx
@@ -154,6 +154,9 @@
                 <a:solidFill>
                   <a:srgbClr val="0B3C6E"/>
                 </a:solidFill>
+                <a:latin typeface="BIZ UDPゴシック"/>
+                <a:ea typeface="BIZ UDPゴシック"/>
+                <a:cs typeface="BIZ UDPゴシック"/>
               </a:rPr>
               <a:t>退職口座への配分（架空の$1,000のうち）</a:t>
             </a:r>
@@ -245,6 +248,9 @@
                   <a:solidFill>
                     <a:srgbClr val="24303F"/>
                   </a:solidFill>
+                  <a:latin typeface="BIZ UDPゴシック"/>
+                  <a:ea typeface="BIZ UDPゴシック"/>
+                  <a:cs typeface="BIZ UDPゴシック"/>
                 </a:defRPr>
               </a:pPr>
             </a:p>
@@ -288,6 +294,9 @@
                 <a:solidFill>
                   <a:srgbClr val="24303F"/>
                 </a:solidFill>
+                <a:latin typeface="BIZ UDPゴシック"/>
+                <a:ea typeface="BIZ UDPゴシック"/>
+                <a:cs typeface="BIZ UDPゴシック"/>
               </a:defRPr>
             </a:pPr>
           </a:p>
@@ -334,6 +343,9 @@
                 <a:solidFill>
                   <a:srgbClr val="5A6676"/>
                 </a:solidFill>
+                <a:latin typeface="BIZ UDPゴシック"/>
+                <a:ea typeface="BIZ UDPゴシック"/>
+                <a:cs typeface="BIZ UDPゴシック"/>
               </a:defRPr>
             </a:pPr>
           </a:p>
@@ -354,9 +366,16 @@
           <a:solidFill>
             <a:srgbClr val="5A6676"/>
           </a:solidFill>
+          <a:latin typeface="BIZ UDPゴシック"/>
+          <a:ea typeface="BIZ UDPゴシック"/>
+          <a:cs typeface="BIZ UDPゴシック"/>
         </a:defRPr>
       </a:pPr>
-      <a:endParaRPr lang="en-US"/>
+      <a:endParaRPr lang="en-US">
+        <a:latin typeface="BIZ UDPゴシック"/>
+        <a:ea typeface="BIZ UDPゴシック"/>
+        <a:cs typeface="BIZ UDPゴシック"/>
+      </a:endParaRPr>
     </a:p>
   </c:txPr>
   <c:externalData r:id="rId1">
@@ -4333,7 +4352,7 @@
         <p:spPr>
           <a:xfrm>
             <a:off x="0" y="855796"/>
-            <a:ext cx="5115503" cy="300082"/>
+            <a:ext cx="6200000" cy="300082"/>
           </a:xfrm>
           <a:prstGeom prst="rect">
             <a:avLst/>
@@ -4786,6 +4805,9 @@
                 <a:solidFill>
                   <a:srgbClr val="24303F"/>
                 </a:solidFill>
+                <a:latin typeface="BIZ UDPゴシック"/>
+                <a:ea typeface="BIZ UDPゴシック"/>
+                <a:cs typeface="BIZ UDPゴシック"/>
               </a:rPr>
               <a:t>輪講 2026/10/23</a:t>
             </a:r>
@@ -4820,6 +4842,9 @@
                 <a:solidFill>
                   <a:srgbClr val="24303F"/>
                 </a:solidFill>
+                <a:latin typeface="BIZ UDPゴシック"/>
+                <a:ea typeface="BIZ UDPゴシック"/>
+                <a:cs typeface="BIZ UDPゴシック"/>
               </a:rPr>
               <a:t>今井元</a:t>
             </a:r>
@@ -4861,6 +4886,9 @@
                 <a:solidFill>
                   <a:srgbClr val="24303F"/>
                 </a:solidFill>
+                <a:latin typeface="BIZ UDPゴシック"/>
+                <a:ea typeface="BIZ UDPゴシック"/>
+                <a:cs typeface="BIZ UDPゴシック"/>
               </a:rPr>
               <a:t>メディアインタラクション研究室　輪講</a:t>
             </a:r>
@@ -4900,6 +4928,9 @@
                 <a:solidFill>
                   <a:srgbClr val="24303F"/>
                 </a:solidFill>
+                <a:latin typeface="BIZ UDPゴシック"/>
+                <a:ea typeface="BIZ UDPゴシック"/>
+                <a:cs typeface="BIZ UDPゴシック"/>
               </a:rPr>
               <a:t>大阪工業大学</a:t>
             </a:r>
@@ -4916,6 +4947,9 @@
                 <a:solidFill>
                   <a:srgbClr val="24303F"/>
                 </a:solidFill>
+                <a:latin typeface="BIZ UDPゴシック"/>
+                <a:ea typeface="BIZ UDPゴシック"/>
+                <a:cs typeface="BIZ UDPゴシック"/>
               </a:rPr>
               <a:t>メディアインタラクション研究室</a:t>
             </a:r>
@@ -4958,6 +4992,9 @@
                 <a:solidFill>
                   <a:srgbClr val="FFFFFF"/>
                 </a:solidFill>
+                <a:latin typeface="BIZ UDPゴシック"/>
+                <a:ea typeface="BIZ UDPゴシック"/>
+                <a:cs typeface="BIZ UDPゴシック"/>
               </a:rPr>
               <a:t>Increasing Saving Behavior Through Age-Progressed Renderings of the Future Self</a:t>
             </a:r>
@@ -4977,6 +5014,9 @@
                 <a:solidFill>
                   <a:srgbClr val="FFFFFF"/>
                 </a:solidFill>
+                <a:latin typeface="BIZ UDPゴシック"/>
+                <a:ea typeface="BIZ UDPゴシック"/>
+                <a:cs typeface="BIZ UDPゴシック"/>
               </a:rPr>
               <a:t>Hershfield et al., Journal of Marketing Research, 2011</a:t>
             </a:r>
@@ -5053,6 +5093,9 @@
                 <a:solidFill>
                   <a:srgbClr val="24303F"/>
                 </a:solidFill>
+                <a:latin typeface="BIZ UDPゴシック"/>
+                <a:ea typeface="BIZ UDPゴシック"/>
+                <a:cs typeface="BIZ UDPゴシック"/>
               </a:rPr>
               <a:t>批判的に読む：限界と疑問</a:t>
             </a:r>
@@ -5071,9 +5114,14 @@
         </p:nvSpPr>
         <p:spPr/>
         <p:txBody>
-          <a:bodyPr/>
-          <a:p>
-            <a:r>
+          <a:bodyPr lIns="27432" rIns="0" wrap="none"/>
+          <a:p>
+            <a:r>
+              <a:rPr sz="900">
+                <a:latin typeface="BIZ UDPゴシック"/>
+                <a:ea typeface="BIZ UDPゴシック"/>
+                <a:cs typeface="BIZ UDPゴシック"/>
+              </a:rPr>
               <a:t>2026/10/23</a:t>
             </a:r>
           </a:p>
@@ -5094,7 +5142,11 @@
           <a:bodyPr/>
           <a:p>
             <a:fld id="{B6F15528-21DE-4FAA-801E-634DDDAF4B2B}" type="slidenum">
-              <a:rPr lang="en-US"/>
+              <a:rPr lang="en-US">
+                <a:latin typeface="BIZ UDPゴシック"/>
+                <a:ea typeface="BIZ UDPゴシック"/>
+                <a:cs typeface="BIZ UDPゴシック"/>
+              </a:rPr>
               <a:t>10</a:t>
             </a:fld>
           </a:p>
@@ -5251,6 +5303,9 @@
                 <a:solidFill>
                   <a:srgbClr val="0B3C6E"/>
                 </a:solidFill>
+                <a:latin typeface="BIZ UDPゴシック"/>
+                <a:ea typeface="BIZ UDPゴシック"/>
+                <a:cs typeface="BIZ UDPゴシック"/>
               </a:rPr>
               <a:t>架空の配分で測っている</a:t>
             </a:r>
@@ -5290,6 +5345,9 @@
                 <a:solidFill>
                   <a:srgbClr val="24303F"/>
                 </a:solidFill>
+                <a:latin typeface="BIZ UDPゴシック"/>
+                <a:ea typeface="BIZ UDPゴシック"/>
+                <a:cs typeface="BIZ UDPゴシック"/>
               </a:rPr>
               <a:t>実際の口座への入金ではない。行動として続くかは分からない</a:t>
             </a:r>
@@ -5447,6 +5505,9 @@
                 <a:solidFill>
                   <a:srgbClr val="0B3C6E"/>
                 </a:solidFill>
+                <a:latin typeface="BIZ UDPゴシック"/>
+                <a:ea typeface="BIZ UDPゴシック"/>
+                <a:cs typeface="BIZ UDPゴシック"/>
               </a:rPr>
               <a:t>効果の持続が不明</a:t>
             </a:r>
@@ -5486,6 +5547,9 @@
                 <a:solidFill>
                   <a:srgbClr val="24303F"/>
                 </a:solidFill>
+                <a:latin typeface="BIZ UDPゴシック"/>
+                <a:ea typeface="BIZ UDPゴシック"/>
+                <a:cs typeface="BIZ UDPゴシック"/>
               </a:rPr>
               <a:t>見た直後に測っている。数週間後にも効果が残るかは未検証</a:t>
             </a:r>
@@ -5643,6 +5707,9 @@
                 <a:solidFill>
                   <a:srgbClr val="0B3C6E"/>
                 </a:solidFill>
+                <a:latin typeface="BIZ UDPゴシック"/>
+                <a:ea typeface="BIZ UDPゴシック"/>
+                <a:cs typeface="BIZ UDPゴシック"/>
               </a:rPr>
               <a:t>「老い」のイメージの影響</a:t>
             </a:r>
@@ -5682,6 +5749,9 @@
                 <a:solidFill>
                   <a:srgbClr val="24303F"/>
                 </a:solidFill>
+                <a:latin typeface="BIZ UDPゴシック"/>
+                <a:ea typeface="BIZ UDPゴシック"/>
+                <a:cs typeface="BIZ UDPゴシック"/>
               </a:rPr>
               <a:t>加齢した顔への感情（不安・嫌悪）が混ざっている可能性</a:t>
             </a:r>
@@ -5839,6 +5909,9 @@
                 <a:solidFill>
                   <a:srgbClr val="0B3C6E"/>
                 </a:solidFill>
+                <a:latin typeface="BIZ UDPゴシック"/>
+                <a:ea typeface="BIZ UDPゴシック"/>
+                <a:cs typeface="BIZ UDPゴシック"/>
               </a:rPr>
               <a:t>参加者の偏り</a:t>
             </a:r>
@@ -5878,6 +5951,9 @@
                 <a:solidFill>
                   <a:srgbClr val="24303F"/>
                 </a:solidFill>
+                <a:latin typeface="BIZ UDPゴシック"/>
+                <a:ea typeface="BIZ UDPゴシック"/>
+                <a:cs typeface="BIZ UDPゴシック"/>
               </a:rPr>
               <a:t>主に大学生。年齢・文化が違う集団でも同じか</a:t>
             </a:r>
@@ -5961,6 +6037,9 @@
                 <a:solidFill>
                   <a:srgbClr val="0B3C6E"/>
                 </a:solidFill>
+                <a:latin typeface="BIZ UDPゴシック"/>
+                <a:ea typeface="BIZ UDPゴシック"/>
+                <a:cs typeface="BIZ UDPゴシック"/>
               </a:rPr>
               <a:t>→ OshiFit は「実際の行動を6週間追跡する」点でこの限界を補える</a:t>
             </a:r>
@@ -5977,6 +6056,9 @@
                 <a:solidFill>
                   <a:srgbClr val="24303F"/>
                 </a:solidFill>
+                <a:latin typeface="BIZ UDPゴシック"/>
+                <a:ea typeface="BIZ UDPゴシック"/>
+                <a:cs typeface="BIZ UDPゴシック"/>
               </a:rPr>
               <a:t>後続の追試やレビュー（例：Grekin et al., 2025）で、効果の大きさと一般化も確認しておきたい</a:t>
             </a:r>
@@ -6029,6 +6111,9 @@
                 <a:solidFill>
                   <a:srgbClr val="24303F"/>
                 </a:solidFill>
+                <a:latin typeface="BIZ UDPゴシック"/>
+                <a:ea typeface="BIZ UDPゴシック"/>
+                <a:cs typeface="BIZ UDPゴシック"/>
               </a:rPr>
               <a:t>OshiFit への示唆：何を引き継ぎ、何を変えるか</a:t>
             </a:r>
@@ -6047,9 +6132,14 @@
         </p:nvSpPr>
         <p:spPr/>
         <p:txBody>
-          <a:bodyPr/>
-          <a:p>
-            <a:r>
+          <a:bodyPr lIns="27432" rIns="0" wrap="none"/>
+          <a:p>
+            <a:r>
+              <a:rPr sz="900">
+                <a:latin typeface="BIZ UDPゴシック"/>
+                <a:ea typeface="BIZ UDPゴシック"/>
+                <a:cs typeface="BIZ UDPゴシック"/>
+              </a:rPr>
               <a:t>2026/10/23</a:t>
             </a:r>
           </a:p>
@@ -6070,7 +6160,11 @@
           <a:bodyPr/>
           <a:p>
             <a:fld id="{B6F15528-21DE-4FAA-801E-634DDDAF4B2B}" type="slidenum">
-              <a:rPr lang="en-US"/>
+              <a:rPr lang="en-US">
+                <a:latin typeface="BIZ UDPゴシック"/>
+                <a:ea typeface="BIZ UDPゴシック"/>
+                <a:cs typeface="BIZ UDPゴシック"/>
+              </a:rPr>
               <a:t>11</a:t>
             </a:fld>
           </a:p>
@@ -6118,6 +6212,9 @@
                           <a:solidFill>
                             <a:srgbClr val="FFFFFF"/>
                           </a:solidFill>
+                          <a:latin typeface="BIZ UDPゴシック"/>
+                          <a:ea typeface="BIZ UDPゴシック"/>
+                          <a:cs typeface="BIZ UDPゴシック"/>
                         </a:rPr>
                         <a:t>観点</a:t>
                       </a:r>
@@ -6167,6 +6264,9 @@
                           <a:solidFill>
                             <a:srgbClr val="FFFFFF"/>
                           </a:solidFill>
+                          <a:latin typeface="BIZ UDPゴシック"/>
+                          <a:ea typeface="BIZ UDPゴシック"/>
+                          <a:cs typeface="BIZ UDPゴシック"/>
                         </a:rPr>
                         <a:t>Hershfield et al. (2011)</a:t>
                       </a:r>
@@ -6216,6 +6316,9 @@
                           <a:solidFill>
                             <a:srgbClr val="FFFFFF"/>
                           </a:solidFill>
+                          <a:latin typeface="BIZ UDPゴシック"/>
+                          <a:ea typeface="BIZ UDPゴシック"/>
+                          <a:cs typeface="BIZ UDPゴシック"/>
                         </a:rPr>
                         <a:t>OshiFit</a:t>
                       </a:r>
@@ -6267,6 +6370,9 @@
                           <a:solidFill>
                             <a:srgbClr val="24303F"/>
                           </a:solidFill>
+                          <a:latin typeface="BIZ UDPゴシック"/>
+                          <a:ea typeface="BIZ UDPゴシック"/>
+                          <a:cs typeface="BIZ UDPゴシック"/>
                         </a:rPr>
                         <a:t>見せる未来</a:t>
                       </a:r>
@@ -6316,6 +6422,9 @@
                           <a:solidFill>
                             <a:srgbClr val="24303F"/>
                           </a:solidFill>
+                          <a:latin typeface="BIZ UDPゴシック"/>
+                          <a:ea typeface="BIZ UDPゴシック"/>
+                          <a:cs typeface="BIZ UDPゴシック"/>
                         </a:rPr>
                         <a:t>数十年後の自分（加齢）</a:t>
                       </a:r>
@@ -6365,6 +6474,9 @@
                           <a:solidFill>
                             <a:srgbClr val="24303F"/>
                           </a:solidFill>
+                          <a:latin typeface="BIZ UDPゴシック"/>
+                          <a:ea typeface="BIZ UDPゴシック"/>
+                          <a:cs typeface="BIZ UDPゴシック"/>
                         </a:rPr>
                         <a:t>6週間後の自分（近い未来）</a:t>
                       </a:r>
@@ -6416,6 +6528,9 @@
                           <a:solidFill>
                             <a:srgbClr val="24303F"/>
                           </a:solidFill>
+                          <a:latin typeface="BIZ UDPゴシック"/>
+                          <a:ea typeface="BIZ UDPゴシック"/>
+                          <a:cs typeface="BIZ UDPゴシック"/>
                         </a:rPr>
                         <a:t>未来の数</a:t>
                       </a:r>
@@ -6465,6 +6580,9 @@
                           <a:solidFill>
                             <a:srgbClr val="24303F"/>
                           </a:solidFill>
+                          <a:latin typeface="BIZ UDPゴシック"/>
+                          <a:ea typeface="BIZ UDPゴシック"/>
+                          <a:cs typeface="BIZ UDPゴシック"/>
                         </a:rPr>
                         <a:t>1つの未来像</a:t>
                       </a:r>
@@ -6514,6 +6632,9 @@
                           <a:solidFill>
                             <a:srgbClr val="24303F"/>
                           </a:solidFill>
+                          <a:latin typeface="BIZ UDPゴシック"/>
+                          <a:ea typeface="BIZ UDPゴシック"/>
+                          <a:cs typeface="BIZ UDPゴシック"/>
                         </a:rPr>
                         <a:t>2つを並べる（今のまま｜提案どおり）</a:t>
                       </a:r>
@@ -6565,6 +6686,9 @@
                           <a:solidFill>
                             <a:srgbClr val="24303F"/>
                           </a:solidFill>
+                          <a:latin typeface="BIZ UDPゴシック"/>
+                          <a:ea typeface="BIZ UDPゴシック"/>
+                          <a:cs typeface="BIZ UDPゴシック"/>
                         </a:rPr>
                         <a:t>表情の変化</a:t>
                       </a:r>
@@ -6614,6 +6738,9 @@
                           <a:solidFill>
                             <a:srgbClr val="24303F"/>
                           </a:solidFill>
+                          <a:latin typeface="BIZ UDPゴシック"/>
+                          <a:ea typeface="BIZ UDPゴシック"/>
+                          <a:cs typeface="BIZ UDPゴシック"/>
                         </a:rPr>
                         <a:t>貯蓄の割合に連動</a:t>
                       </a:r>
@@ -6663,6 +6790,9 @@
                           <a:solidFill>
                             <a:srgbClr val="24303F"/>
                           </a:solidFill>
+                          <a:latin typeface="BIZ UDPゴシック"/>
+                          <a:ea typeface="BIZ UDPゴシック"/>
+                          <a:cs typeface="BIZ UDPゴシック"/>
                         </a:rPr>
                         <a:t>選んだ提案の予測区分に連動（3段階）</a:t>
                       </a:r>
@@ -6714,6 +6844,9 @@
                           <a:solidFill>
                             <a:srgbClr val="24303F"/>
                           </a:solidFill>
+                          <a:latin typeface="BIZ UDPゴシック"/>
+                          <a:ea typeface="BIZ UDPゴシック"/>
+                          <a:cs typeface="BIZ UDPゴシック"/>
                         </a:rPr>
                         <a:t>不確かさ</a:t>
                       </a:r>
@@ -6763,6 +6896,9 @@
                           <a:solidFill>
                             <a:srgbClr val="24303F"/>
                           </a:solidFill>
+                          <a:latin typeface="BIZ UDPゴシック"/>
+                          <a:ea typeface="BIZ UDPゴシック"/>
+                          <a:cs typeface="BIZ UDPゴシック"/>
                         </a:rPr>
                         <a:t>確定した画像</a:t>
                       </a:r>
@@ -6812,6 +6948,9 @@
                           <a:solidFill>
                             <a:srgbClr val="24303F"/>
                           </a:solidFill>
+                          <a:latin typeface="BIZ UDPゴシック"/>
+                          <a:ea typeface="BIZ UDPゴシック"/>
+                          <a:cs typeface="BIZ UDPゴシック"/>
                         </a:rPr>
                         <a:t>予測の幅をゆらぎで表示</a:t>
                       </a:r>
@@ -6863,6 +7002,9 @@
                           <a:solidFill>
                             <a:srgbClr val="24303F"/>
                           </a:solidFill>
+                          <a:latin typeface="BIZ UDPゴシック"/>
+                          <a:ea typeface="BIZ UDPゴシック"/>
+                          <a:cs typeface="BIZ UDPゴシック"/>
                         </a:rPr>
                         <a:t>測るもの</a:t>
                       </a:r>
@@ -6912,6 +7054,9 @@
                           <a:solidFill>
                             <a:srgbClr val="24303F"/>
                           </a:solidFill>
+                          <a:latin typeface="BIZ UDPゴシック"/>
+                          <a:ea typeface="BIZ UDPゴシック"/>
+                          <a:cs typeface="BIZ UDPゴシック"/>
                         </a:rPr>
                         <a:t>直後の架空の配分</a:t>
                       </a:r>
@@ -6961,6 +7106,9 @@
                           <a:solidFill>
                             <a:srgbClr val="24303F"/>
                           </a:solidFill>
+                          <a:latin typeface="BIZ UDPゴシック"/>
+                          <a:ea typeface="BIZ UDPゴシック"/>
+                          <a:cs typeface="BIZ UDPゴシック"/>
                         </a:rPr>
                         <a:t>実際の実行率を毎週・6週間</a:t>
                       </a:r>
@@ -7012,6 +7160,9 @@
                           <a:solidFill>
                             <a:srgbClr val="24303F"/>
                           </a:solidFill>
+                          <a:latin typeface="BIZ UDPゴシック"/>
+                          <a:ea typeface="BIZ UDPゴシック"/>
+                          <a:cs typeface="BIZ UDPゴシック"/>
                         </a:rPr>
                         <a:t>比較の相手</a:t>
                       </a:r>
@@ -7061,6 +7212,9 @@
                           <a:solidFill>
                             <a:srgbClr val="24303F"/>
                           </a:solidFill>
+                          <a:latin typeface="BIZ UDPゴシック"/>
+                          <a:ea typeface="BIZ UDPゴシック"/>
+                          <a:cs typeface="BIZ UDPゴシック"/>
                         </a:rPr>
                         <a:t>今の自分の姿</a:t>
                       </a:r>
@@ -7110,6 +7264,9 @@
                           <a:solidFill>
                             <a:srgbClr val="24303F"/>
                           </a:solidFill>
+                          <a:latin typeface="BIZ UDPゴシック"/>
+                          <a:ea typeface="BIZ UDPゴシック"/>
+                          <a:cs typeface="BIZ UDPゴシック"/>
                         </a:rPr>
                         <a:t>同じ提案を文章で受ける群（群B）</a:t>
                       </a:r>
@@ -7201,6 +7358,9 @@
                 <a:solidFill>
                   <a:srgbClr val="FFFFFF"/>
                 </a:solidFill>
+                <a:latin typeface="BIZ UDPゴシック"/>
+                <a:ea typeface="BIZ UDPゴシック"/>
+                <a:cs typeface="BIZ UDPゴシック"/>
               </a:rPr>
               <a:t>引き継ぐ：自分に似た姿・未来・選択への即時フィードバック</a:t>
             </a:r>
@@ -7217,6 +7377,9 @@
                 <a:solidFill>
                   <a:srgbClr val="FFFFFF"/>
                 </a:solidFill>
+                <a:latin typeface="BIZ UDPゴシック"/>
+                <a:ea typeface="BIZ UDPゴシック"/>
+                <a:cs typeface="BIZ UDPゴシック"/>
               </a:rPr>
               <a:t>変える：近い未来・2つの未来・不確かさの表示・実際の行動</a:t>
             </a:r>
@@ -7269,6 +7432,9 @@
                 <a:solidFill>
                   <a:srgbClr val="24303F"/>
                 </a:solidFill>
+                <a:latin typeface="BIZ UDPゴシック"/>
+                <a:ea typeface="BIZ UDPゴシック"/>
+                <a:cs typeface="BIZ UDPゴシック"/>
               </a:rPr>
               <a:t>本実験への反映（具体案）</a:t>
             </a:r>
@@ -7287,9 +7453,14 @@
         </p:nvSpPr>
         <p:spPr/>
         <p:txBody>
-          <a:bodyPr/>
-          <a:p>
-            <a:r>
+          <a:bodyPr lIns="27432" rIns="0" wrap="none"/>
+          <a:p>
+            <a:r>
+              <a:rPr sz="900">
+                <a:latin typeface="BIZ UDPゴシック"/>
+                <a:ea typeface="BIZ UDPゴシック"/>
+                <a:cs typeface="BIZ UDPゴシック"/>
+              </a:rPr>
               <a:t>2026/10/23</a:t>
             </a:r>
           </a:p>
@@ -7310,7 +7481,11 @@
           <a:bodyPr/>
           <a:p>
             <a:fld id="{B6F15528-21DE-4FAA-801E-634DDDAF4B2B}" type="slidenum">
-              <a:rPr lang="en-US"/>
+              <a:rPr lang="en-US">
+                <a:latin typeface="BIZ UDPゴシック"/>
+                <a:ea typeface="BIZ UDPゴシック"/>
+                <a:cs typeface="BIZ UDPゴシック"/>
+              </a:rPr>
               <a:t>12</a:t>
             </a:fld>
           </a:p>
@@ -7421,6 +7596,9 @@
                 <a:solidFill>
                   <a:srgbClr val="FFFFFF"/>
                 </a:solidFill>
+                <a:latin typeface="BIZ UDPゴシック"/>
+                <a:ea typeface="BIZ UDPゴシック"/>
+                <a:cs typeface="BIZ UDPゴシック"/>
               </a:rPr>
               <a:t>1</a:t>
             </a:r>
@@ -7460,6 +7638,9 @@
                 <a:solidFill>
                   <a:srgbClr val="0B3C6E"/>
                 </a:solidFill>
+                <a:latin typeface="BIZ UDPゴシック"/>
+                <a:ea typeface="BIZ UDPゴシック"/>
+                <a:cs typeface="BIZ UDPゴシック"/>
               </a:rPr>
               <a:t>事後アンケートに「未来の自分とのつながり」を追加</a:t>
             </a:r>
@@ -7476,6 +7657,9 @@
                 <a:solidFill>
                   <a:srgbClr val="24303F"/>
                 </a:solidFill>
+                <a:latin typeface="BIZ UDPゴシック"/>
+                <a:ea typeface="BIZ UDPゴシック"/>
+                <a:cs typeface="BIZ UDPゴシック"/>
               </a:rPr>
               <a:t>2つの円の重なりで答える尺度（Ersner-Hershfield et al., 2009）を6週時点で測る</a:t>
             </a:r>
@@ -7587,6 +7771,9 @@
                 <a:solidFill>
                   <a:srgbClr val="FFFFFF"/>
                 </a:solidFill>
+                <a:latin typeface="BIZ UDPゴシック"/>
+                <a:ea typeface="BIZ UDPゴシック"/>
+                <a:cs typeface="BIZ UDPゴシック"/>
               </a:rPr>
               <a:t>2</a:t>
             </a:r>
@@ -7626,6 +7813,9 @@
                 <a:solidFill>
                   <a:srgbClr val="0B3C6E"/>
                 </a:solidFill>
+                <a:latin typeface="BIZ UDPゴシック"/>
+                <a:ea typeface="BIZ UDPゴシック"/>
+                <a:cs typeface="BIZ UDPゴシック"/>
               </a:rPr>
               <a:t>Path A の表情を弱めに設定</a:t>
             </a:r>
@@ -7642,6 +7832,9 @@
                 <a:solidFill>
                   <a:srgbClr val="24303F"/>
                 </a:solidFill>
+                <a:latin typeface="BIZ UDPゴシック"/>
+                <a:ea typeface="BIZ UDPゴシック"/>
+                <a:cs typeface="BIZ UDPゴシック"/>
               </a:rPr>
               <a:t>見た目への否定的な感情が混ざる可能性を踏まえ、疲れの表現は3段階の中で最も弱い段階から始める</a:t>
             </a:r>
@@ -7753,6 +7946,9 @@
                 <a:solidFill>
                   <a:srgbClr val="FFFFFF"/>
                 </a:solidFill>
+                <a:latin typeface="BIZ UDPゴシック"/>
+                <a:ea typeface="BIZ UDPゴシック"/>
+                <a:cs typeface="BIZ UDPゴシック"/>
               </a:rPr>
               <a:t>3</a:t>
             </a:r>
@@ -7792,6 +7988,9 @@
                 <a:solidFill>
                   <a:srgbClr val="0B3C6E"/>
                 </a:solidFill>
+                <a:latin typeface="BIZ UDPゴシック"/>
+                <a:ea typeface="BIZ UDPゴシック"/>
+                <a:cs typeface="BIZ UDPゴシック"/>
               </a:rPr>
               <a:t>「選ぶ → 表情が変わる」を提案画面に入れる</a:t>
             </a:r>
@@ -7808,6 +8007,9 @@
                 <a:solidFill>
                   <a:srgbClr val="24303F"/>
                 </a:solidFill>
+                <a:latin typeface="BIZ UDPゴシック"/>
+                <a:ea typeface="BIZ UDPゴシック"/>
+                <a:cs typeface="BIZ UDPゴシック"/>
               </a:rPr>
               <a:t>群Cのみ。提案カードを選ぶと Path B のアバターが即座に更新される</a:t>
             </a:r>
@@ -7860,6 +8062,9 @@
                 <a:solidFill>
                   <a:srgbClr val="24303F"/>
                 </a:solidFill>
+                <a:latin typeface="BIZ UDPゴシック"/>
+                <a:ea typeface="BIZ UDPゴシック"/>
+                <a:cs typeface="BIZ UDPゴシック"/>
               </a:rPr>
               <a:t>議論したいこと</a:t>
             </a:r>
@@ -7878,9 +8083,14 @@
         </p:nvSpPr>
         <p:spPr/>
         <p:txBody>
-          <a:bodyPr/>
-          <a:p>
-            <a:r>
+          <a:bodyPr lIns="27432" rIns="0" wrap="none"/>
+          <a:p>
+            <a:r>
+              <a:rPr sz="900">
+                <a:latin typeface="BIZ UDPゴシック"/>
+                <a:ea typeface="BIZ UDPゴシック"/>
+                <a:cs typeface="BIZ UDPゴシック"/>
+              </a:rPr>
               <a:t>2026/10/23</a:t>
             </a:r>
           </a:p>
@@ -7901,7 +8111,11 @@
           <a:bodyPr/>
           <a:p>
             <a:fld id="{B6F15528-21DE-4FAA-801E-634DDDAF4B2B}" type="slidenum">
-              <a:rPr lang="en-US"/>
+              <a:rPr lang="en-US">
+                <a:latin typeface="BIZ UDPゴシック"/>
+                <a:ea typeface="BIZ UDPゴシック"/>
+                <a:cs typeface="BIZ UDPゴシック"/>
+              </a:rPr>
               <a:t>13</a:t>
             </a:fld>
           </a:p>
@@ -8050,6 +8264,9 @@
                 <a:solidFill>
                   <a:srgbClr val="0B3C6E"/>
                 </a:solidFill>
+                <a:latin typeface="BIZ UDPゴシック"/>
+                <a:ea typeface="BIZ UDPゴシック"/>
+                <a:cs typeface="BIZ UDPゴシック"/>
               </a:rPr>
               <a:t>6週間という「近い未来」でも効くか</a:t>
             </a:r>
@@ -8066,6 +8283,9 @@
                 <a:solidFill>
                   <a:srgbClr val="24303F"/>
                 </a:solidFill>
+                <a:latin typeface="BIZ UDPゴシック"/>
+                <a:ea typeface="BIZ UDPゴシック"/>
+                <a:cs typeface="BIZ UDPゴシック"/>
               </a:rPr>
               <a:t>数十年後の自分と違い、6週間後の自分はもともと「自分」に近い。効果は小さくなる？</a:t>
             </a:r>
@@ -8215,6 +8435,9 @@
                 <a:solidFill>
                   <a:srgbClr val="0B3C6E"/>
                 </a:solidFill>
+                <a:latin typeface="BIZ UDPゴシック"/>
+                <a:ea typeface="BIZ UDPゴシック"/>
+                <a:cs typeface="BIZ UDPゴシック"/>
               </a:rPr>
               <a:t>「今のまま」の自分を見せることの是非</a:t>
             </a:r>
@@ -8231,6 +8454,9 @@
                 <a:solidFill>
                   <a:srgbClr val="24303F"/>
                 </a:solidFill>
+                <a:latin typeface="BIZ UDPゴシック"/>
+                <a:ea typeface="BIZ UDPゴシック"/>
+                <a:cs typeface="BIZ UDPゴシック"/>
               </a:rPr>
               <a:t>Path A を見て不安が高まりすぎないか。見せない選択肢を用意すべきか</a:t>
             </a:r>
@@ -8380,6 +8606,9 @@
                 <a:solidFill>
                   <a:srgbClr val="0B3C6E"/>
                 </a:solidFill>
+                <a:latin typeface="BIZ UDPゴシック"/>
+                <a:ea typeface="BIZ UDPゴシック"/>
+                <a:cs typeface="BIZ UDPゴシック"/>
               </a:rPr>
               <a:t>似ている度合いはどこまで必要か</a:t>
             </a:r>
@@ -8396,6 +8625,9 @@
                 <a:solidFill>
                   <a:srgbClr val="24303F"/>
                 </a:solidFill>
+                <a:latin typeface="BIZ UDPゴシック"/>
+                <a:ea typeface="BIZ UDPゴシック"/>
+                <a:cs typeface="BIZ UDPゴシック"/>
               </a:rPr>
               <a:t>写真から作る場合とパーツで作る場合で、効果に差が出るか（共変量にするか）</a:t>
             </a:r>
@@ -8448,6 +8680,9 @@
                 <a:solidFill>
                   <a:srgbClr val="24303F"/>
                 </a:solidFill>
+                <a:latin typeface="BIZ UDPゴシック"/>
+                <a:ea typeface="BIZ UDPゴシック"/>
+                <a:cs typeface="BIZ UDPゴシック"/>
               </a:rPr>
               <a:t>参考文献</a:t>
             </a:r>
@@ -8466,9 +8701,14 @@
         </p:nvSpPr>
         <p:spPr/>
         <p:txBody>
-          <a:bodyPr/>
-          <a:p>
-            <a:r>
+          <a:bodyPr lIns="27432" rIns="0" wrap="none"/>
+          <a:p>
+            <a:r>
+              <a:rPr sz="900">
+                <a:latin typeface="BIZ UDPゴシック"/>
+                <a:ea typeface="BIZ UDPゴシック"/>
+                <a:cs typeface="BIZ UDPゴシック"/>
+              </a:rPr>
               <a:t>2026/10/23</a:t>
             </a:r>
           </a:p>
@@ -8489,7 +8729,11 @@
           <a:bodyPr/>
           <a:p>
             <a:fld id="{B6F15528-21DE-4FAA-801E-634DDDAF4B2B}" type="slidenum">
-              <a:rPr lang="en-US"/>
+              <a:rPr lang="en-US">
+                <a:latin typeface="BIZ UDPゴシック"/>
+                <a:ea typeface="BIZ UDPゴシック"/>
+                <a:cs typeface="BIZ UDPゴシック"/>
+              </a:rPr>
               <a:t>14</a:t>
             </a:fld>
           </a:p>
@@ -8528,6 +8772,9 @@
                 <a:solidFill>
                   <a:srgbClr val="24303F"/>
                 </a:solidFill>
+                <a:latin typeface="BIZ UDPゴシック"/>
+                <a:ea typeface="BIZ UDPゴシック"/>
+                <a:cs typeface="BIZ UDPゴシック"/>
               </a:rPr>
               <a:t>Hershfield, H. E., Goldstein, D. G., Sharpe, W. F., Fox, J., Yeykelis, L., Carstensen, L. L., &amp; Bailenson, J. N. (2011). Increasing saving behavior through age-progressed renderings of the future self. Journal of Marketing Research, 48(SPL), S23–S37.</a:t>
             </a:r>
@@ -8544,6 +8791,9 @@
                 <a:solidFill>
                   <a:srgbClr val="24303F"/>
                 </a:solidFill>
+                <a:latin typeface="BIZ UDPゴシック"/>
+                <a:ea typeface="BIZ UDPゴシック"/>
+                <a:cs typeface="BIZ UDPゴシック"/>
               </a:rPr>
               <a:t>Ersner-Hershfield, H., Wimmer, G. E., &amp; Knutson, B. (2009). Saving for the future self: Neural measures of future self-continuity predict temporal discounting. Social Cognitive and Affective Neuroscience, 4(1), 85–92.</a:t>
             </a:r>
@@ -8560,6 +8810,9 @@
                 <a:solidFill>
                   <a:srgbClr val="24303F"/>
                 </a:solidFill>
+                <a:latin typeface="BIZ UDPゴシック"/>
+                <a:ea typeface="BIZ UDPゴシック"/>
+                <a:cs typeface="BIZ UDPゴシック"/>
               </a:rPr>
               <a:t>Parfit, D. (1971). Personal identity. The Philosophical Review, 80(1), 3–27.</a:t>
             </a:r>
@@ -8576,6 +8829,9 @@
                 <a:solidFill>
                   <a:srgbClr val="24303F"/>
                 </a:solidFill>
+                <a:latin typeface="BIZ UDPゴシック"/>
+                <a:ea typeface="BIZ UDPゴシック"/>
+                <a:cs typeface="BIZ UDPゴシック"/>
               </a:rPr>
               <a:t>Yee, N., &amp; Bailenson, J. (2007). The Proteus Effect: The effect of transformed self-representation on behavior. Human Communication Research, 33(3), 271–290.</a:t>
             </a:r>
@@ -8592,6 +8848,9 @@
                 <a:solidFill>
                   <a:srgbClr val="24303F"/>
                 </a:solidFill>
+                <a:latin typeface="BIZ UDPゴシック"/>
+                <a:ea typeface="BIZ UDPゴシック"/>
+                <a:cs typeface="BIZ UDPゴシック"/>
               </a:rPr>
               <a:t>Fox, J., &amp; Bailenson, J. N. (2009). Virtual self-modeling: The effects of vicarious reinforcement and identification on exercise behaviors. Media Psychology, 12(1), 1–25.</a:t>
             </a:r>
@@ -8608,6 +8867,9 @@
                 <a:solidFill>
                   <a:srgbClr val="24303F"/>
                 </a:solidFill>
+                <a:latin typeface="BIZ UDPゴシック"/>
+                <a:ea typeface="BIZ UDPゴシック"/>
+                <a:cs typeface="BIZ UDPゴシック"/>
               </a:rPr>
               <a:t>Grekin, E. R., Thomas, H. A., Souweidane, M. A., &amp; Stidham, J. L. (2025). The effects of future self-continuity interventions on behavioral outcomes in adults: A systematic review of the literature. https://doi.org/10.1177/27000710251391610</a:t>
             </a:r>
@@ -8624,6 +8886,9 @@
                 <a:solidFill>
                   <a:srgbClr val="24303F"/>
                 </a:solidFill>
+                <a:latin typeface="BIZ UDPゴシック"/>
+                <a:ea typeface="BIZ UDPゴシック"/>
+                <a:cs typeface="BIZ UDPゴシック"/>
               </a:rPr>
               <a:t>Imai, G., &amp; Ooi, S. (2026). OshiFit: Study on proposal system with “Oshi-katsu” based on individual characteristics predicted by one’s own avatar. IEVC 2026.</a:t>
             </a:r>
@@ -8676,6 +8941,9 @@
                 <a:solidFill>
                   <a:srgbClr val="24303F"/>
                 </a:solidFill>
+                <a:latin typeface="BIZ UDPゴシック"/>
+                <a:ea typeface="BIZ UDPゴシック"/>
+                <a:cs typeface="BIZ UDPゴシック"/>
               </a:rPr>
               <a:t>論文情報と選んだ理由</a:t>
             </a:r>
@@ -8694,9 +8962,14 @@
         </p:nvSpPr>
         <p:spPr/>
         <p:txBody>
-          <a:bodyPr/>
-          <a:p>
-            <a:r>
+          <a:bodyPr lIns="27432" rIns="0" wrap="none"/>
+          <a:p>
+            <a:r>
+              <a:rPr sz="900">
+                <a:latin typeface="BIZ UDPゴシック"/>
+                <a:ea typeface="BIZ UDPゴシック"/>
+                <a:cs typeface="BIZ UDPゴシック"/>
+              </a:rPr>
               <a:t>2026/10/23</a:t>
             </a:r>
           </a:p>
@@ -8717,7 +8990,11 @@
           <a:bodyPr/>
           <a:p>
             <a:fld id="{B6F15528-21DE-4FAA-801E-634DDDAF4B2B}" type="slidenum">
-              <a:rPr lang="en-US"/>
+              <a:rPr lang="en-US">
+                <a:latin typeface="BIZ UDPゴシック"/>
+                <a:ea typeface="BIZ UDPゴシック"/>
+                <a:cs typeface="BIZ UDPゴシック"/>
+              </a:rPr>
               <a:t>2</a:t>
             </a:fld>
           </a:p>
@@ -8866,6 +9143,9 @@
                 <a:solidFill>
                   <a:srgbClr val="0B3C6E"/>
                 </a:solidFill>
+                <a:latin typeface="BIZ UDPゴシック"/>
+                <a:ea typeface="BIZ UDPゴシック"/>
+                <a:cs typeface="BIZ UDPゴシック"/>
               </a:rPr>
               <a:t>論文情報</a:t>
             </a:r>
@@ -8905,6 +9185,9 @@
                 <a:solidFill>
                   <a:srgbClr val="5A6676"/>
                 </a:solidFill>
+                <a:latin typeface="BIZ UDPゴシック"/>
+                <a:ea typeface="BIZ UDPゴシック"/>
+                <a:cs typeface="BIZ UDPゴシック"/>
               </a:rPr>
               <a:t>タイトル</a:t>
             </a:r>
@@ -8921,6 +9204,9 @@
                 <a:solidFill>
                   <a:srgbClr val="24303F"/>
                 </a:solidFill>
+                <a:latin typeface="BIZ UDPゴシック"/>
+                <a:ea typeface="BIZ UDPゴシック"/>
+                <a:cs typeface="BIZ UDPゴシック"/>
               </a:rPr>
               <a:t>Increasing Saving Behavior Through Age-Progressed Renderings of the Future Self</a:t>
             </a:r>
@@ -8937,6 +9223,9 @@
                 <a:solidFill>
                   <a:srgbClr val="5A6676"/>
                 </a:solidFill>
+                <a:latin typeface="BIZ UDPゴシック"/>
+                <a:ea typeface="BIZ UDPゴシック"/>
+                <a:cs typeface="BIZ UDPゴシック"/>
               </a:rPr>
               <a:t>著者</a:t>
             </a:r>
@@ -8953,6 +9242,9 @@
                 <a:solidFill>
                   <a:srgbClr val="24303F"/>
                 </a:solidFill>
+                <a:latin typeface="BIZ UDPゴシック"/>
+                <a:ea typeface="BIZ UDPゴシック"/>
+                <a:cs typeface="BIZ UDPゴシック"/>
               </a:rPr>
               <a:t>H. E. Hershfield, D. G. Goldstein, W. F. Sharpe, J. Fox, L. Yeykelis, L. L. Carstensen, J. N. Bailenson</a:t>
             </a:r>
@@ -8969,6 +9261,9 @@
                 <a:solidFill>
                   <a:srgbClr val="5A6676"/>
                 </a:solidFill>
+                <a:latin typeface="BIZ UDPゴシック"/>
+                <a:ea typeface="BIZ UDPゴシック"/>
+                <a:cs typeface="BIZ UDPゴシック"/>
               </a:rPr>
               <a:t>掲載</a:t>
             </a:r>
@@ -8985,6 +9280,9 @@
                 <a:solidFill>
                   <a:srgbClr val="24303F"/>
                 </a:solidFill>
+                <a:latin typeface="BIZ UDPゴシック"/>
+                <a:ea typeface="BIZ UDPゴシック"/>
+                <a:cs typeface="BIZ UDPゴシック"/>
               </a:rPr>
               <a:t>Journal of Marketing Research, 48 (Special Issue), S23–S37, 2011</a:t>
             </a:r>
@@ -9001,6 +9299,9 @@
                 <a:solidFill>
                   <a:srgbClr val="5A6676"/>
                 </a:solidFill>
+                <a:latin typeface="BIZ UDPゴシック"/>
+                <a:ea typeface="BIZ UDPゴシック"/>
+                <a:cs typeface="BIZ UDPゴシック"/>
               </a:rPr>
               <a:t>DOI</a:t>
             </a:r>
@@ -9017,6 +9318,9 @@
                 <a:solidFill>
                   <a:srgbClr val="24303F"/>
                 </a:solidFill>
+                <a:latin typeface="BIZ UDPゴシック"/>
+                <a:ea typeface="BIZ UDPゴシック"/>
+                <a:cs typeface="BIZ UDPゴシック"/>
               </a:rPr>
               <a:t>10.1509/jmkr.48.SPL.S23</a:t>
             </a:r>
@@ -9174,6 +9478,9 @@
                 <a:solidFill>
                   <a:srgbClr val="0B3C6E"/>
                 </a:solidFill>
+                <a:latin typeface="BIZ UDPゴシック"/>
+                <a:ea typeface="BIZ UDPゴシック"/>
+                <a:cs typeface="BIZ UDPゴシック"/>
               </a:rPr>
               <a:t>OshiFit の設計の直接の根拠</a:t>
             </a:r>
@@ -9213,6 +9520,9 @@
                 <a:solidFill>
                   <a:srgbClr val="24303F"/>
                 </a:solidFill>
+                <a:latin typeface="BIZ UDPゴシック"/>
+                <a:ea typeface="BIZ UDPゴシック"/>
+                <a:cs typeface="BIZ UDPゴシック"/>
               </a:rPr>
               <a:t>「将来の自分の見込みをアバターで見せる」発想の原点</a:t>
             </a:r>
@@ -9370,6 +9680,9 @@
                 <a:solidFill>
                   <a:srgbClr val="0B3C6E"/>
                 </a:solidFill>
+                <a:latin typeface="BIZ UDPゴシック"/>
+                <a:ea typeface="BIZ UDPゴシック"/>
+                <a:cs typeface="BIZ UDPゴシック"/>
               </a:rPr>
               <a:t>構図が推し活と同じ</a:t>
             </a:r>
@@ -9409,6 +9722,9 @@
                 <a:solidFill>
                   <a:srgbClr val="24303F"/>
                 </a:solidFill>
+                <a:latin typeface="BIZ UDPゴシック"/>
+                <a:ea typeface="BIZ UDPゴシック"/>
+                <a:cs typeface="BIZ UDPゴシック"/>
               </a:rPr>
               <a:t>自分に似た姿 × 将来 × お金や時間の配分</a:t>
             </a:r>
@@ -9566,6 +9882,9 @@
                 <a:solidFill>
                   <a:srgbClr val="0B3C6E"/>
                 </a:solidFill>
+                <a:latin typeface="BIZ UDPゴシック"/>
+                <a:ea typeface="BIZ UDPゴシック"/>
+                <a:cs typeface="BIZ UDPゴシック"/>
               </a:rPr>
               <a:t>手続きを詳しく知りたい</a:t>
             </a:r>
@@ -9605,6 +9924,9 @@
                 <a:solidFill>
                   <a:srgbClr val="24303F"/>
                 </a:solidFill>
+                <a:latin typeface="BIZ UDPゴシック"/>
+                <a:ea typeface="BIZ UDPゴシック"/>
+                <a:cs typeface="BIZ UDPゴシック"/>
               </a:rPr>
               <a:t>計画書で引用済み。提示方法と測り方を実験に生かす</a:t>
             </a:r>
@@ -9657,6 +9979,9 @@
                 <a:solidFill>
                   <a:srgbClr val="24303F"/>
                 </a:solidFill>
+                <a:latin typeface="BIZ UDPゴシック"/>
+                <a:ea typeface="BIZ UDPゴシック"/>
+                <a:cs typeface="BIZ UDPゴシック"/>
               </a:rPr>
               <a:t>背景：なぜ人は将来のために貯めないのか</a:t>
             </a:r>
@@ -9675,9 +10000,14 @@
         </p:nvSpPr>
         <p:spPr/>
         <p:txBody>
-          <a:bodyPr/>
-          <a:p>
-            <a:r>
+          <a:bodyPr lIns="27432" rIns="0" wrap="none"/>
+          <a:p>
+            <a:r>
+              <a:rPr sz="900">
+                <a:latin typeface="BIZ UDPゴシック"/>
+                <a:ea typeface="BIZ UDPゴシック"/>
+                <a:cs typeface="BIZ UDPゴシック"/>
+              </a:rPr>
               <a:t>2026/10/23</a:t>
             </a:r>
           </a:p>
@@ -9698,7 +10028,11 @@
           <a:bodyPr/>
           <a:p>
             <a:fld id="{B6F15528-21DE-4FAA-801E-634DDDAF4B2B}" type="slidenum">
-              <a:rPr lang="en-US"/>
+              <a:rPr lang="en-US">
+                <a:latin typeface="BIZ UDPゴシック"/>
+                <a:ea typeface="BIZ UDPゴシック"/>
+                <a:cs typeface="BIZ UDPゴシック"/>
+              </a:rPr>
               <a:t>3</a:t>
             </a:fld>
           </a:p>
@@ -9855,6 +10189,9 @@
                 <a:solidFill>
                   <a:srgbClr val="0B3C6E"/>
                 </a:solidFill>
+                <a:latin typeface="BIZ UDPゴシック"/>
+                <a:ea typeface="BIZ UDPゴシック"/>
+                <a:cs typeface="BIZ UDPゴシック"/>
               </a:rPr>
               <a:t>目先の報酬を重く見る</a:t>
             </a:r>
@@ -9894,6 +10231,9 @@
                 <a:solidFill>
                   <a:srgbClr val="24303F"/>
                 </a:solidFill>
+                <a:latin typeface="BIZ UDPゴシック"/>
+                <a:ea typeface="BIZ UDPゴシック"/>
+                <a:cs typeface="BIZ UDPゴシック"/>
               </a:rPr>
               <a:t>時間割引：すぐ手に入るものほど価値を大きく感じ、将来の報酬を小さく見積もる</a:t>
             </a:r>
@@ -10051,6 +10391,9 @@
                 <a:solidFill>
                   <a:srgbClr val="0B3C6E"/>
                 </a:solidFill>
+                <a:latin typeface="BIZ UDPゴシック"/>
+                <a:ea typeface="BIZ UDPゴシック"/>
+                <a:cs typeface="BIZ UDPゴシック"/>
               </a:rPr>
               <a:t>未来の自分は「他人」</a:t>
             </a:r>
@@ -10090,6 +10433,9 @@
                 <a:solidFill>
                   <a:srgbClr val="24303F"/>
                 </a:solidFill>
+                <a:latin typeface="BIZ UDPゴシック"/>
+                <a:ea typeface="BIZ UDPゴシック"/>
+                <a:cs typeface="BIZ UDPゴシック"/>
               </a:rPr>
               <a:t>将来の自分を考えるときの脳の活動は、他人を考えるときに近い（Ersner-Hershfield et al., 2009）</a:t>
             </a:r>
@@ -10247,6 +10593,9 @@
                 <a:solidFill>
                   <a:srgbClr val="0B3C6E"/>
                 </a:solidFill>
+                <a:latin typeface="BIZ UDPゴシック"/>
+                <a:ea typeface="BIZ UDPゴシック"/>
+                <a:cs typeface="BIZ UDPゴシック"/>
               </a:rPr>
               <a:t>従来の対策</a:t>
             </a:r>
@@ -10286,6 +10635,9 @@
                 <a:solidFill>
                   <a:srgbClr val="24303F"/>
                 </a:solidFill>
+                <a:latin typeface="BIZ UDPゴシック"/>
+                <a:ea typeface="BIZ UDPゴシック"/>
+                <a:cs typeface="BIZ UDPゴシック"/>
               </a:rPr>
               <a:t>前もって約束させる（コミットメント）、将来の報酬の価値を強調する</a:t>
             </a:r>
@@ -10459,6 +10811,9 @@
                 <a:solidFill>
                   <a:srgbClr val="CCE9FF"/>
                 </a:solidFill>
+                <a:latin typeface="BIZ UDPゴシック"/>
+                <a:ea typeface="BIZ UDPゴシック"/>
+                <a:cs typeface="BIZ UDPゴシック"/>
               </a:rPr>
               <a:t>本論文の「第3の道」</a:t>
             </a:r>
@@ -10475,6 +10830,9 @@
                 <a:solidFill>
                   <a:srgbClr val="FFFFFF"/>
                 </a:solidFill>
+                <a:latin typeface="BIZ UDPゴシック"/>
+                <a:ea typeface="BIZ UDPゴシック"/>
+                <a:cs typeface="BIZ UDPゴシック"/>
               </a:rPr>
               <a:t>報酬ではなく「未来の自分」を身近にする</a:t>
             </a:r>
@@ -10491,6 +10849,9 @@
                 <a:solidFill>
                   <a:srgbClr val="FFFFFF"/>
                 </a:solidFill>
+                <a:latin typeface="BIZ UDPゴシック"/>
+                <a:ea typeface="BIZ UDPゴシック"/>
+                <a:cs typeface="BIZ UDPゴシック"/>
               </a:rPr>
               <a:t>加齢させた自分の姿と向き合うと、将来に向けた選択が増えるのでは？</a:t>
             </a:r>
@@ -10543,6 +10904,9 @@
                 <a:solidFill>
                   <a:srgbClr val="24303F"/>
                 </a:solidFill>
+                <a:latin typeface="BIZ UDPゴシック"/>
+                <a:ea typeface="BIZ UDPゴシック"/>
+                <a:cs typeface="BIZ UDPゴシック"/>
               </a:rPr>
               <a:t>研究の問いと仮説</a:t>
             </a:r>
@@ -10561,9 +10925,14 @@
         </p:nvSpPr>
         <p:spPr/>
         <p:txBody>
-          <a:bodyPr/>
-          <a:p>
-            <a:r>
+          <a:bodyPr lIns="27432" rIns="0" wrap="none"/>
+          <a:p>
+            <a:r>
+              <a:rPr sz="900">
+                <a:latin typeface="BIZ UDPゴシック"/>
+                <a:ea typeface="BIZ UDPゴシック"/>
+                <a:cs typeface="BIZ UDPゴシック"/>
+              </a:rPr>
               <a:t>2026/10/23</a:t>
             </a:r>
           </a:p>
@@ -10584,7 +10953,11 @@
           <a:bodyPr/>
           <a:p>
             <a:fld id="{B6F15528-21DE-4FAA-801E-634DDDAF4B2B}" type="slidenum">
-              <a:rPr lang="en-US"/>
+              <a:rPr lang="en-US">
+                <a:latin typeface="BIZ UDPゴシック"/>
+                <a:ea typeface="BIZ UDPゴシック"/>
+                <a:cs typeface="BIZ UDPゴシック"/>
+              </a:rPr>
               <a:t>4</a:t>
             </a:fld>
           </a:p>
@@ -10733,6 +11106,9 @@
                 <a:solidFill>
                   <a:srgbClr val="5A6676"/>
                 </a:solidFill>
+                <a:latin typeface="BIZ UDPゴシック"/>
+                <a:ea typeface="BIZ UDPゴシック"/>
+                <a:cs typeface="BIZ UDPゴシック"/>
               </a:rPr>
               <a:t>問い</a:t>
             </a:r>
@@ -10749,6 +11125,9 @@
                 <a:solidFill>
                   <a:srgbClr val="0B3C6E"/>
                 </a:solidFill>
+                <a:latin typeface="BIZ UDPゴシック"/>
+                <a:ea typeface="BIZ UDPゴシック"/>
+                <a:cs typeface="BIZ UDPゴシック"/>
               </a:rPr>
               <a:t>加齢させた「未来の自分」の姿と対話すると、人は将来に向けてお金を回すようになるか？</a:t>
             </a:r>
@@ -10898,6 +11277,9 @@
                 <a:solidFill>
                   <a:srgbClr val="5A6676"/>
                 </a:solidFill>
+                <a:latin typeface="BIZ UDPゴシック"/>
+                <a:ea typeface="BIZ UDPゴシック"/>
+                <a:cs typeface="BIZ UDPゴシック"/>
               </a:rPr>
               <a:t>仮説</a:t>
             </a:r>
@@ -10914,6 +11296,9 @@
                 <a:solidFill>
                   <a:srgbClr val="E8457C"/>
                 </a:solidFill>
+                <a:latin typeface="BIZ UDPゴシック"/>
+                <a:ea typeface="BIZ UDPゴシック"/>
+                <a:cs typeface="BIZ UDPゴシック"/>
               </a:rPr>
               <a:t>未来の自分を見た人は、すぐの報酬より後の報酬を選びやすくなり、退職後のための貯蓄への配分が増える</a:t>
             </a:r>
@@ -10953,6 +11338,9 @@
                 <a:solidFill>
                   <a:srgbClr val="0B3C6E"/>
                 </a:solidFill>
+                <a:latin typeface="BIZ UDPゴシック"/>
+                <a:ea typeface="BIZ UDPゴシック"/>
+                <a:cs typeface="BIZ UDPゴシック"/>
               </a:rPr>
               <a:t>考え方の筋道</a:t>
             </a:r>
@@ -11014,6 +11402,9 @@
                 <a:solidFill>
                   <a:srgbClr val="0B3C6E"/>
                 </a:solidFill>
+                <a:latin typeface="BIZ UDPゴシック"/>
+                <a:ea typeface="BIZ UDPゴシック"/>
+                <a:cs typeface="BIZ UDPゴシック"/>
               </a:rPr>
               <a:t>加齢させた自分の姿</a:t>
             </a:r>
@@ -11117,6 +11508,9 @@
                 <a:solidFill>
                   <a:srgbClr val="0B3C6E"/>
                 </a:solidFill>
+                <a:latin typeface="BIZ UDPゴシック"/>
+                <a:ea typeface="BIZ UDPゴシック"/>
+                <a:cs typeface="BIZ UDPゴシック"/>
               </a:rPr>
               <a:t>未来の自分が</a:t>
             </a:r>
@@ -11133,6 +11527,9 @@
                 <a:solidFill>
                   <a:srgbClr val="0B3C6E"/>
                 </a:solidFill>
+                <a:latin typeface="BIZ UDPゴシック"/>
+                <a:ea typeface="BIZ UDPゴシック"/>
+                <a:cs typeface="BIZ UDPゴシック"/>
               </a:rPr>
               <a:t>「自分」に感じられる</a:t>
             </a:r>
@@ -11236,6 +11633,9 @@
                 <a:solidFill>
                   <a:srgbClr val="0B3C6E"/>
                 </a:solidFill>
+                <a:latin typeface="BIZ UDPゴシック"/>
+                <a:ea typeface="BIZ UDPゴシック"/>
+                <a:cs typeface="BIZ UDPゴシック"/>
               </a:rPr>
               <a:t>将来への配分が増える</a:t>
             </a:r>
@@ -11288,6 +11688,9 @@
                 <a:solidFill>
                   <a:srgbClr val="24303F"/>
                 </a:solidFill>
+                <a:latin typeface="BIZ UDPゴシック"/>
+                <a:ea typeface="BIZ UDPゴシック"/>
+                <a:cs typeface="BIZ UDPゴシック"/>
               </a:rPr>
               <a:t>実験の構成（4つの研究）</a:t>
             </a:r>
@@ -11306,9 +11709,14 @@
         </p:nvSpPr>
         <p:spPr/>
         <p:txBody>
-          <a:bodyPr/>
-          <a:p>
-            <a:r>
+          <a:bodyPr lIns="27432" rIns="0" wrap="none"/>
+          <a:p>
+            <a:r>
+              <a:rPr sz="900">
+                <a:latin typeface="BIZ UDPゴシック"/>
+                <a:ea typeface="BIZ UDPゴシック"/>
+                <a:cs typeface="BIZ UDPゴシック"/>
+              </a:rPr>
               <a:t>2026/10/23</a:t>
             </a:r>
           </a:p>
@@ -11329,7 +11737,11 @@
           <a:bodyPr/>
           <a:p>
             <a:fld id="{B6F15528-21DE-4FAA-801E-634DDDAF4B2B}" type="slidenum">
-              <a:rPr lang="en-US"/>
+              <a:rPr lang="en-US">
+                <a:latin typeface="BIZ UDPゴシック"/>
+                <a:ea typeface="BIZ UDPゴシック"/>
+                <a:cs typeface="BIZ UDPゴシック"/>
+              </a:rPr>
               <a:t>5</a:t>
             </a:fld>
           </a:p>
@@ -11486,6 +11898,9 @@
                 <a:solidFill>
                   <a:srgbClr val="0B3C6E"/>
                 </a:solidFill>
+                <a:latin typeface="BIZ UDPゴシック"/>
+                <a:ea typeface="BIZ UDPゴシック"/>
+                <a:cs typeface="BIZ UDPゴシック"/>
               </a:rPr>
               <a:t>参加者</a:t>
             </a:r>
@@ -11525,6 +11940,9 @@
                 <a:solidFill>
                   <a:srgbClr val="24303F"/>
                 </a:solidFill>
+                <a:latin typeface="BIZ UDPゴシック"/>
+                <a:ea typeface="BIZ UDPゴシック"/>
+                <a:cs typeface="BIZ UDPゴシック"/>
               </a:rPr>
               <a:t>主に大学生。働く世代を対象にしたオンライン実験も含む</a:t>
             </a:r>
@@ -11682,6 +12100,9 @@
                 <a:solidFill>
                   <a:srgbClr val="0B3C6E"/>
                 </a:solidFill>
+                <a:latin typeface="BIZ UDPゴシック"/>
+                <a:ea typeface="BIZ UDPゴシック"/>
+                <a:cs typeface="BIZ UDPゴシック"/>
               </a:rPr>
               <a:t>操作</a:t>
             </a:r>
@@ -11721,6 +12142,9 @@
                 <a:solidFill>
                   <a:srgbClr val="24303F"/>
                 </a:solidFill>
+                <a:latin typeface="BIZ UDPゴシック"/>
+                <a:ea typeface="BIZ UDPゴシック"/>
+                <a:cs typeface="BIZ UDPゴシック"/>
               </a:rPr>
               <a:t>「今の自分」と「加齢させた自分」のどちらを見るか（顔写真を加齢処理）</a:t>
             </a:r>
@@ -11878,6 +12302,9 @@
                 <a:solidFill>
                   <a:srgbClr val="0B3C6E"/>
                 </a:solidFill>
+                <a:latin typeface="BIZ UDPゴシック"/>
+                <a:ea typeface="BIZ UDPゴシック"/>
+                <a:cs typeface="BIZ UDPゴシック"/>
               </a:rPr>
               <a:t>見せ方</a:t>
             </a:r>
@@ -11917,6 +12344,9 @@
                 <a:solidFill>
                   <a:srgbClr val="24303F"/>
                 </a:solidFill>
+                <a:latin typeface="BIZ UDPゴシック"/>
+                <a:ea typeface="BIZ UDPゴシック"/>
+                <a:cs typeface="BIZ UDPゴシック"/>
               </a:rPr>
               <a:t>① 没入型VRの「仮想の鏡」  ② 画面上の意思決定ツール（貯蓄額を動かすと、加齢した自分の表情が変わる）</a:t>
             </a:r>
@@ -12074,6 +12504,9 @@
                 <a:solidFill>
                   <a:srgbClr val="0B3C6E"/>
                 </a:solidFill>
+                <a:latin typeface="BIZ UDPゴシック"/>
+                <a:ea typeface="BIZ UDPゴシック"/>
+                <a:cs typeface="BIZ UDPゴシック"/>
               </a:rPr>
               <a:t>測り方</a:t>
             </a:r>
@@ -12113,6 +12546,9 @@
                 <a:solidFill>
                   <a:srgbClr val="24303F"/>
                 </a:solidFill>
+                <a:latin typeface="BIZ UDPゴシック"/>
+                <a:ea typeface="BIZ UDPゴシック"/>
+                <a:cs typeface="BIZ UDPゴシック"/>
               </a:rPr>
               <a:t>架空の臨時収入 $1,000 の配分（退職口座を含む）、すぐの報酬と後の報酬の選択、給与からの積立の割合</a:t>
             </a:r>
@@ -12152,6 +12588,9 @@
                 <a:solidFill>
                   <a:srgbClr val="E8457C"/>
                 </a:solidFill>
+                <a:latin typeface="BIZ UDPゴシック"/>
+                <a:ea typeface="BIZ UDPゴシック"/>
+                <a:cs typeface="BIZ UDPゴシック"/>
               </a:rPr>
               <a:t>※ 各研究の参加者数・条件・統計値は、発表前に原著の Method / Results で確認して差し替えること</a:t>
             </a:r>
@@ -12204,6 +12643,9 @@
                 <a:solidFill>
                   <a:srgbClr val="24303F"/>
                 </a:solidFill>
+                <a:latin typeface="BIZ UDPゴシック"/>
+                <a:ea typeface="BIZ UDPゴシック"/>
+                <a:cs typeface="BIZ UDPゴシック"/>
               </a:rPr>
               <a:t>代表的な手続き：VR の「仮想の鏡」</a:t>
             </a:r>
@@ -12222,9 +12664,14 @@
         </p:nvSpPr>
         <p:spPr/>
         <p:txBody>
-          <a:bodyPr/>
-          <a:p>
-            <a:r>
+          <a:bodyPr lIns="27432" rIns="0" wrap="none"/>
+          <a:p>
+            <a:r>
+              <a:rPr sz="900">
+                <a:latin typeface="BIZ UDPゴシック"/>
+                <a:ea typeface="BIZ UDPゴシック"/>
+                <a:cs typeface="BIZ UDPゴシック"/>
+              </a:rPr>
               <a:t>2026/10/23</a:t>
             </a:r>
           </a:p>
@@ -12245,7 +12692,11 @@
           <a:bodyPr/>
           <a:p>
             <a:fld id="{B6F15528-21DE-4FAA-801E-634DDDAF4B2B}" type="slidenum">
-              <a:rPr lang="en-US"/>
+              <a:rPr lang="en-US">
+                <a:latin typeface="BIZ UDPゴシック"/>
+                <a:ea typeface="BIZ UDPゴシック"/>
+                <a:cs typeface="BIZ UDPゴシック"/>
+              </a:rPr>
               <a:t>6</a:t>
             </a:fld>
           </a:p>
@@ -12394,6 +12845,9 @@
                 <a:solidFill>
                   <a:srgbClr val="0B3C6E"/>
                 </a:solidFill>
+                <a:latin typeface="BIZ UDPゴシック"/>
+                <a:ea typeface="BIZ UDPゴシック"/>
+                <a:cs typeface="BIZ UDPゴシック"/>
               </a:rPr>
               <a:t>顔写真から</a:t>
             </a:r>
@@ -12410,6 +12864,9 @@
                 <a:solidFill>
                   <a:srgbClr val="0B3C6E"/>
                 </a:solidFill>
+                <a:latin typeface="BIZ UDPゴシック"/>
+                <a:ea typeface="BIZ UDPゴシック"/>
+                <a:cs typeface="BIZ UDPゴシック"/>
               </a:rPr>
               <a:t>アバターを作る</a:t>
             </a:r>
@@ -12601,6 +13058,9 @@
                 <a:solidFill>
                   <a:srgbClr val="0B3C6E"/>
                 </a:solidFill>
+                <a:latin typeface="BIZ UDPゴシック"/>
+                <a:ea typeface="BIZ UDPゴシック"/>
+                <a:cs typeface="BIZ UDPゴシック"/>
               </a:rPr>
               <a:t>VRの鏡で</a:t>
             </a:r>
@@ -12617,6 +13077,9 @@
                 <a:solidFill>
                   <a:srgbClr val="0B3C6E"/>
                 </a:solidFill>
+                <a:latin typeface="BIZ UDPゴシック"/>
+                <a:ea typeface="BIZ UDPゴシック"/>
+                <a:cs typeface="BIZ UDPゴシック"/>
               </a:rPr>
               <a:t>自分の姿を見る</a:t>
             </a:r>
@@ -12808,6 +13271,9 @@
                 <a:solidFill>
                   <a:srgbClr val="0B3C6E"/>
                 </a:solidFill>
+                <a:latin typeface="BIZ UDPゴシック"/>
+                <a:ea typeface="BIZ UDPゴシック"/>
+                <a:cs typeface="BIZ UDPゴシック"/>
               </a:rPr>
               <a:t>研究者のアバター</a:t>
             </a:r>
@@ -12824,6 +13290,9 @@
                 <a:solidFill>
                   <a:srgbClr val="0B3C6E"/>
                 </a:solidFill>
+                <a:latin typeface="BIZ UDPゴシック"/>
+                <a:ea typeface="BIZ UDPゴシック"/>
+                <a:cs typeface="BIZ UDPゴシック"/>
               </a:rPr>
               <a:t>と短く会話</a:t>
             </a:r>
@@ -13015,6 +13484,9 @@
                 <a:solidFill>
                   <a:srgbClr val="0B3C6E"/>
                 </a:solidFill>
+                <a:latin typeface="BIZ UDPゴシック"/>
+                <a:ea typeface="BIZ UDPゴシック"/>
+                <a:cs typeface="BIZ UDPゴシック"/>
               </a:rPr>
               <a:t>架空の $1,000 を</a:t>
             </a:r>
@@ -13031,6 +13503,9 @@
                 <a:solidFill>
                   <a:srgbClr val="0B3C6E"/>
                 </a:solidFill>
+                <a:latin typeface="BIZ UDPゴシック"/>
+                <a:ea typeface="BIZ UDPゴシック"/>
+                <a:cs typeface="BIZ UDPゴシック"/>
               </a:rPr>
               <a:t>配分する</a:t>
             </a:r>
@@ -13114,6 +13589,9 @@
                 <a:solidFill>
                   <a:srgbClr val="7A8594"/>
                 </a:solidFill>
+                <a:latin typeface="BIZ UDPゴシック"/>
+                <a:ea typeface="BIZ UDPゴシック"/>
+                <a:cs typeface="BIZ UDPゴシック"/>
               </a:rPr>
               <a:t>今の自分を見る群</a:t>
             </a:r>
@@ -13223,6 +13701,9 @@
                 <a:solidFill>
                   <a:srgbClr val="24303F"/>
                 </a:solidFill>
+                <a:latin typeface="BIZ UDPゴシック"/>
+                <a:ea typeface="BIZ UDPゴシック"/>
+                <a:cs typeface="BIZ UDPゴシック"/>
               </a:rPr>
               <a:t>鏡に映るのは</a:t>
             </a:r>
@@ -13239,6 +13720,9 @@
                 <a:solidFill>
                   <a:srgbClr val="0B3C6E"/>
                 </a:solidFill>
+                <a:latin typeface="BIZ UDPゴシック"/>
+                <a:ea typeface="BIZ UDPゴシック"/>
+                <a:cs typeface="BIZ UDPゴシック"/>
               </a:rPr>
               <a:t>現在の自分の顔</a:t>
             </a:r>
@@ -13322,6 +13806,9 @@
                 <a:solidFill>
                   <a:srgbClr val="E8457C"/>
                 </a:solidFill>
+                <a:latin typeface="BIZ UDPゴシック"/>
+                <a:ea typeface="BIZ UDPゴシック"/>
+                <a:cs typeface="BIZ UDPゴシック"/>
               </a:rPr>
               <a:t>加齢させた自分を見る群</a:t>
             </a:r>
@@ -13431,6 +13918,9 @@
                 <a:solidFill>
                   <a:srgbClr val="24303F"/>
                 </a:solidFill>
+                <a:latin typeface="BIZ UDPゴシック"/>
+                <a:ea typeface="BIZ UDPゴシック"/>
+                <a:cs typeface="BIZ UDPゴシック"/>
               </a:rPr>
               <a:t>鏡に映るのは</a:t>
             </a:r>
@@ -13447,6 +13937,9 @@
                 <a:solidFill>
                   <a:srgbClr val="0B3C6E"/>
                 </a:solidFill>
+                <a:latin typeface="BIZ UDPゴシック"/>
+                <a:ea typeface="BIZ UDPゴシック"/>
+                <a:cs typeface="BIZ UDPゴシック"/>
               </a:rPr>
               <a:t>高齢に加齢処理した自分の顔</a:t>
             </a:r>
@@ -13499,6 +13992,9 @@
                 <a:solidFill>
                   <a:srgbClr val="24303F"/>
                 </a:solidFill>
+                <a:latin typeface="BIZ UDPゴシック"/>
+                <a:ea typeface="BIZ UDPゴシック"/>
+                <a:cs typeface="BIZ UDPゴシック"/>
               </a:rPr>
               <a:t>主な結果</a:t>
             </a:r>
@@ -13517,9 +14013,14 @@
         </p:nvSpPr>
         <p:spPr/>
         <p:txBody>
-          <a:bodyPr/>
-          <a:p>
-            <a:r>
+          <a:bodyPr lIns="27432" rIns="0" wrap="none"/>
+          <a:p>
+            <a:r>
+              <a:rPr sz="900">
+                <a:latin typeface="BIZ UDPゴシック"/>
+                <a:ea typeface="BIZ UDPゴシック"/>
+                <a:cs typeface="BIZ UDPゴシック"/>
+              </a:rPr>
               <a:t>2026/10/23</a:t>
             </a:r>
           </a:p>
@@ -13540,7 +14041,11 @@
           <a:bodyPr/>
           <a:p>
             <a:fld id="{B6F15528-21DE-4FAA-801E-634DDDAF4B2B}" type="slidenum">
-              <a:rPr lang="en-US"/>
+              <a:rPr lang="en-US">
+                <a:latin typeface="BIZ UDPゴシック"/>
+                <a:ea typeface="BIZ UDPゴシック"/>
+                <a:cs typeface="BIZ UDPゴシック"/>
+              </a:rPr>
               <a:t>7</a:t>
             </a:fld>
           </a:p>
@@ -13597,6 +14102,9 @@
                 <a:solidFill>
                   <a:srgbClr val="E8457C"/>
                 </a:solidFill>
+                <a:latin typeface="BIZ UDPゴシック"/>
+                <a:ea typeface="BIZ UDPゴシック"/>
+                <a:cs typeface="BIZ UDPゴシック"/>
               </a:rPr>
               <a:t>※ 二次資料で報告されている値（$172 vs $80）。原著の数値で要確認</a:t>
             </a:r>
@@ -13680,6 +14188,9 @@
                 <a:solidFill>
                   <a:srgbClr val="E8457C"/>
                 </a:solidFill>
+                <a:latin typeface="BIZ UDPゴシック"/>
+                <a:ea typeface="BIZ UDPゴシック"/>
+                <a:cs typeface="BIZ UDPゴシック"/>
               </a:rPr>
               <a:t>約2倍</a:t>
             </a:r>
@@ -13696,6 +14207,9 @@
                 <a:solidFill>
                   <a:srgbClr val="24303F"/>
                 </a:solidFill>
+                <a:latin typeface="BIZ UDPゴシック"/>
+                <a:ea typeface="BIZ UDPゴシック"/>
+                <a:cs typeface="BIZ UDPゴシック"/>
               </a:rPr>
               <a:t>加齢させた自分を見た群は、退職口座へ多く配分した</a:t>
             </a:r>
@@ -13853,6 +14367,9 @@
                 <a:solidFill>
                   <a:srgbClr val="0B3C6E"/>
                 </a:solidFill>
+                <a:latin typeface="BIZ UDPゴシック"/>
+                <a:ea typeface="BIZ UDPゴシック"/>
+                <a:cs typeface="BIZ UDPゴシック"/>
               </a:rPr>
               <a:t>4つの研究に共通する傾向</a:t>
             </a:r>
@@ -13888,7 +14405,7 @@
               <a:buClr>
                 <a:srgbClr val="0099FF"/>
               </a:buClr>
-              <a:buFont typeface="Arial"/>
+              <a:buFont typeface="BIZ UDPゴシック"/>
               <a:buChar char="•"/>
             </a:pPr>
             <a:r>
@@ -13896,6 +14413,9 @@
                 <a:solidFill>
                   <a:srgbClr val="24303F"/>
                 </a:solidFill>
+                <a:latin typeface="BIZ UDPゴシック"/>
+                <a:ea typeface="BIZ UDPゴシック"/>
+                <a:cs typeface="BIZ UDPゴシック"/>
               </a:rPr>
               <a:t>未来の自分と対話した人ほど、すぐの報酬より後の報酬を選びやすい</a:t>
             </a:r>
@@ -13908,7 +14428,7 @@
               <a:buClr>
                 <a:srgbClr val="0099FF"/>
               </a:buClr>
-              <a:buFont typeface="Arial"/>
+              <a:buFont typeface="BIZ UDPゴシック"/>
               <a:buChar char="•"/>
             </a:pPr>
             <a:r>
@@ -13916,6 +14436,9 @@
                 <a:solidFill>
                   <a:srgbClr val="24303F"/>
                 </a:solidFill>
+                <a:latin typeface="BIZ UDPゴシック"/>
+                <a:ea typeface="BIZ UDPゴシック"/>
+                <a:cs typeface="BIZ UDPゴシック"/>
               </a:rPr>
               <a:t>没入型VRでも、画面上のツールでも同じ方向の効果</a:t>
             </a:r>
@@ -13928,7 +14451,7 @@
               <a:buClr>
                 <a:srgbClr val="0099FF"/>
               </a:buClr>
-              <a:buFont typeface="Arial"/>
+              <a:buFont typeface="BIZ UDPゴシック"/>
               <a:buChar char="•"/>
             </a:pPr>
             <a:r>
@@ -13936,6 +14459,9 @@
                 <a:solidFill>
                   <a:srgbClr val="24303F"/>
                 </a:solidFill>
+                <a:latin typeface="BIZ UDPゴシック"/>
+                <a:ea typeface="BIZ UDPゴシック"/>
+                <a:cs typeface="BIZ UDPゴシック"/>
               </a:rPr>
               <a:t>働く世代のオンライン実験でも、給与からの積立が増える方向</a:t>
             </a:r>
@@ -13988,6 +14514,9 @@
                 <a:solidFill>
                   <a:srgbClr val="24303F"/>
                 </a:solidFill>
+                <a:latin typeface="BIZ UDPゴシック"/>
+                <a:ea typeface="BIZ UDPゴシック"/>
+                <a:cs typeface="BIZ UDPゴシック"/>
               </a:rPr>
               <a:t>意思決定ツール：表情が選択に連動する</a:t>
             </a:r>
@@ -14006,9 +14535,14 @@
         </p:nvSpPr>
         <p:spPr/>
         <p:txBody>
-          <a:bodyPr/>
-          <a:p>
-            <a:r>
+          <a:bodyPr lIns="27432" rIns="0" wrap="none"/>
+          <a:p>
+            <a:r>
+              <a:rPr sz="900">
+                <a:latin typeface="BIZ UDPゴシック"/>
+                <a:ea typeface="BIZ UDPゴシック"/>
+                <a:cs typeface="BIZ UDPゴシック"/>
+              </a:rPr>
               <a:t>2026/10/23</a:t>
             </a:r>
           </a:p>
@@ -14029,7 +14563,11 @@
           <a:bodyPr/>
           <a:p>
             <a:fld id="{B6F15528-21DE-4FAA-801E-634DDDAF4B2B}" type="slidenum">
-              <a:rPr lang="en-US"/>
+              <a:rPr lang="en-US">
+                <a:latin typeface="BIZ UDPゴシック"/>
+                <a:ea typeface="BIZ UDPゴシック"/>
+                <a:cs typeface="BIZ UDPゴシック"/>
+              </a:rPr>
               <a:t>8</a:t>
             </a:fld>
           </a:p>
@@ -14112,6 +14650,9 @@
                 <a:solidFill>
                   <a:srgbClr val="0B3C6E"/>
                 </a:solidFill>
+                <a:latin typeface="BIZ UDPゴシック"/>
+                <a:ea typeface="BIZ UDPゴシック"/>
+                <a:cs typeface="BIZ UDPゴシック"/>
               </a:rPr>
               <a:t>貯蓄の割合を動かすと…</a:t>
             </a:r>
@@ -14175,6 +14716,9 @@
                 <a:solidFill>
                   <a:srgbClr val="0B3C6E"/>
                 </a:solidFill>
+                <a:latin typeface="BIZ UDPゴシック"/>
+                <a:ea typeface="BIZ UDPゴシック"/>
+                <a:cs typeface="BIZ UDPゴシック"/>
               </a:rPr>
               <a:t>少ない</a:t>
             </a:r>
@@ -14238,6 +14782,9 @@
                 <a:solidFill>
                   <a:srgbClr val="0B3C6E"/>
                 </a:solidFill>
+                <a:latin typeface="BIZ UDPゴシック"/>
+                <a:ea typeface="BIZ UDPゴシック"/>
+                <a:cs typeface="BIZ UDPゴシック"/>
               </a:rPr>
               <a:t>ふつう</a:t>
             </a:r>
@@ -14301,6 +14848,9 @@
                 <a:solidFill>
                   <a:srgbClr val="0B3C6E"/>
                 </a:solidFill>
+                <a:latin typeface="BIZ UDPゴシック"/>
+                <a:ea typeface="BIZ UDPゴシック"/>
+                <a:cs typeface="BIZ UDPゴシック"/>
               </a:rPr>
               <a:t>多い</a:t>
             </a:r>
@@ -14468,7 +15018,7 @@
               <a:buClr>
                 <a:srgbClr val="0099FF"/>
               </a:buClr>
-              <a:buFont typeface="Arial"/>
+              <a:buFont typeface="BIZ UDPゴシック"/>
               <a:buChar char="•"/>
             </a:pPr>
             <a:r>
@@ -14476,6 +15026,9 @@
                 <a:solidFill>
                   <a:srgbClr val="24303F"/>
                 </a:solidFill>
+                <a:latin typeface="BIZ UDPゴシック"/>
+                <a:ea typeface="BIZ UDPゴシック"/>
+                <a:cs typeface="BIZ UDPゴシック"/>
               </a:rPr>
               <a:t>貯蓄に回す額をスライダーで選ぶ</a:t>
             </a:r>
@@ -14488,7 +15041,7 @@
               <a:buClr>
                 <a:srgbClr val="0099FF"/>
               </a:buClr>
-              <a:buFont typeface="Arial"/>
+              <a:buFont typeface="BIZ UDPゴシック"/>
               <a:buChar char="•"/>
             </a:pPr>
             <a:r>
@@ -14496,6 +15049,9 @@
                 <a:solidFill>
                   <a:srgbClr val="24303F"/>
                 </a:solidFill>
+                <a:latin typeface="BIZ UDPゴシック"/>
+                <a:ea typeface="BIZ UDPゴシック"/>
+                <a:cs typeface="BIZ UDPゴシック"/>
               </a:rPr>
               <a:t>少ないと加齢した自分が悲しそうに、多いと嬉しそうになる</a:t>
             </a:r>
@@ -14653,6 +15209,9 @@
                 <a:solidFill>
                   <a:srgbClr val="12A38A"/>
                 </a:solidFill>
+                <a:latin typeface="BIZ UDPゴシック"/>
+                <a:ea typeface="BIZ UDPゴシック"/>
+                <a:cs typeface="BIZ UDPゴシック"/>
               </a:rPr>
               <a:t>OshiFit との対応</a:t>
             </a:r>
@@ -14692,6 +15251,9 @@
                 <a:solidFill>
                   <a:srgbClr val="0B3C6E"/>
                 </a:solidFill>
+                <a:latin typeface="BIZ UDPゴシック"/>
+                <a:ea typeface="BIZ UDPゴシック"/>
+                <a:cs typeface="BIZ UDPゴシック"/>
               </a:rPr>
               <a:t>「選択 → 未来の自分の表情」の即時フィードバック</a:t>
             </a:r>
@@ -14704,7 +15266,7 @@
               <a:buClr>
                 <a:srgbClr val="0099FF"/>
               </a:buClr>
-              <a:buFont typeface="Arial"/>
+              <a:buFont typeface="BIZ UDPゴシック"/>
               <a:buChar char="•"/>
             </a:pPr>
             <a:r>
@@ -14712,6 +15274,9 @@
                 <a:solidFill>
                   <a:srgbClr val="24303F"/>
                 </a:solidFill>
+                <a:latin typeface="BIZ UDPゴシック"/>
+                <a:ea typeface="BIZ UDPゴシック"/>
+                <a:cs typeface="BIZ UDPゴシック"/>
               </a:rPr>
               <a:t>OshiFit でも、提案を選ぶと Path B のアバターの表情が変わる</a:t>
             </a:r>
@@ -14724,7 +15289,7 @@
               <a:buClr>
                 <a:srgbClr val="E8457C"/>
               </a:buClr>
-              <a:buFont typeface="Arial"/>
+              <a:buFont typeface="BIZ UDPゴシック"/>
               <a:buChar char="•"/>
             </a:pPr>
             <a:r>
@@ -14732,6 +15297,9 @@
                 <a:solidFill>
                   <a:srgbClr val="24303F"/>
                 </a:solidFill>
+                <a:latin typeface="BIZ UDPゴシック"/>
+                <a:ea typeface="BIZ UDPゴシック"/>
+                <a:cs typeface="BIZ UDPゴシック"/>
               </a:rPr>
               <a:t>ただし表情は予測の区分（3段階）にのみ連動させ、誇張しない</a:t>
             </a:r>
@@ -14784,6 +15352,9 @@
                 <a:solidFill>
                   <a:srgbClr val="24303F"/>
                 </a:solidFill>
+                <a:latin typeface="BIZ UDPゴシック"/>
+                <a:ea typeface="BIZ UDPゴシック"/>
+                <a:cs typeface="BIZ UDPゴシック"/>
               </a:rPr>
               <a:t>著者らの結論と貢献</a:t>
             </a:r>
@@ -14802,9 +15373,14 @@
         </p:nvSpPr>
         <p:spPr/>
         <p:txBody>
-          <a:bodyPr/>
-          <a:p>
-            <a:r>
+          <a:bodyPr lIns="27432" rIns="0" wrap="none"/>
+          <a:p>
+            <a:r>
+              <a:rPr sz="900">
+                <a:latin typeface="BIZ UDPゴシック"/>
+                <a:ea typeface="BIZ UDPゴシック"/>
+                <a:cs typeface="BIZ UDPゴシック"/>
+              </a:rPr>
               <a:t>2026/10/23</a:t>
             </a:r>
           </a:p>
@@ -14825,7 +15401,11 @@
           <a:bodyPr/>
           <a:p>
             <a:fld id="{B6F15528-21DE-4FAA-801E-634DDDAF4B2B}" type="slidenum">
-              <a:rPr lang="en-US"/>
+              <a:rPr lang="en-US">
+                <a:latin typeface="BIZ UDPゴシック"/>
+                <a:ea typeface="BIZ UDPゴシック"/>
+                <a:cs typeface="BIZ UDPゴシック"/>
+              </a:rPr>
               <a:t>9</a:t>
             </a:fld>
           </a:p>
@@ -14982,6 +15562,9 @@
                 <a:solidFill>
                   <a:srgbClr val="0B3C6E"/>
                 </a:solidFill>
+                <a:latin typeface="BIZ UDPゴシック"/>
+                <a:ea typeface="BIZ UDPゴシック"/>
+                <a:cs typeface="BIZ UDPゴシック"/>
               </a:rPr>
               <a:t>未来の自分を「見える化」する介入</a:t>
             </a:r>
@@ -14998,6 +15581,9 @@
                 <a:solidFill>
                   <a:srgbClr val="24303F"/>
                 </a:solidFill>
+                <a:latin typeface="BIZ UDPゴシック"/>
+                <a:ea typeface="BIZ UDPゴシック"/>
+                <a:cs typeface="BIZ UDPゴシック"/>
               </a:rPr>
               <a:t>報酬を変えるのではなく、未来の自分との結びつきを強めるという新しい道を示した</a:t>
             </a:r>
@@ -15155,6 +15741,9 @@
                 <a:solidFill>
                   <a:srgbClr val="0B3C6E"/>
                 </a:solidFill>
+                <a:latin typeface="BIZ UDPゴシック"/>
+                <a:ea typeface="BIZ UDPゴシック"/>
+                <a:cs typeface="BIZ UDPゴシック"/>
               </a:rPr>
               <a:t>VR から日常のツールへ</a:t>
             </a:r>
@@ -15171,6 +15760,9 @@
                 <a:solidFill>
                   <a:srgbClr val="24303F"/>
                 </a:solidFill>
+                <a:latin typeface="BIZ UDPゴシック"/>
+                <a:ea typeface="BIZ UDPゴシック"/>
+                <a:cs typeface="BIZ UDPゴシック"/>
               </a:rPr>
               <a:t>没入型VRだけでなく、画面上の意思決定支援でも使えることを示した</a:t>
             </a:r>
@@ -15328,6 +15920,9 @@
                 <a:solidFill>
                   <a:srgbClr val="0B3C6E"/>
                 </a:solidFill>
+                <a:latin typeface="BIZ UDPゴシック"/>
+                <a:ea typeface="BIZ UDPゴシック"/>
+                <a:cs typeface="BIZ UDPゴシック"/>
               </a:rPr>
               <a:t>実務への広がり</a:t>
             </a:r>
@@ -15344,6 +15939,9 @@
                 <a:solidFill>
                   <a:srgbClr val="24303F"/>
                 </a:solidFill>
+                <a:latin typeface="BIZ UDPゴシック"/>
+                <a:ea typeface="BIZ UDPゴシック"/>
+                <a:cs typeface="BIZ UDPゴシック"/>
               </a:rPr>
               <a:t>退職貯蓄のサービスで「加齢した自分」を見せる取り組みにつながった</a:t>
             </a:r>
@@ -15401,12 +15999,12 @@
     </a:clrScheme>
     <a:fontScheme name="mixlab">
       <a:majorFont>
-        <a:latin typeface="Arial"/>
+        <a:latin typeface="BIZ UDPゴシック"/>
         <a:ea typeface="BIZ UDPゴシック"/>
         <a:cs typeface=""/>
       </a:majorFont>
       <a:minorFont>
-        <a:latin typeface="Arial"/>
+        <a:latin typeface="BIZ UDPゴシック"/>
         <a:ea typeface="BIZ UDPゴシック"/>
         <a:cs typeface=""/>
       </a:minorFont>
@@ -15602,7 +16200,7 @@
     </a:clrScheme>
     <a:fontScheme name="Office">
       <a:majorFont>
-        <a:latin typeface="游ゴシック Light" panose="020F0302020204030204"/>
+        <a:latin typeface="BIZ UDPゴシック"/>
         <a:ea typeface=""/>
         <a:cs typeface=""/>
         <a:font script="Jpan" typeface="游ゴシック Light"/>
@@ -15637,7 +16235,7 @@
         <a:font script="Geor" typeface="Sylfaen"/>
       </a:majorFont>
       <a:minorFont>
-        <a:latin typeface="游ゴシック" panose="020F0502020204030204"/>
+        <a:latin typeface="BIZ UDPゴシック"/>
         <a:ea typeface=""/>
         <a:cs typeface=""/>
         <a:font script="Jpan" typeface="游ゴシック"/>
